--- a/docs/ahg-2026/kit/step-cards/1-why-we-are-here.pptx
+++ b/docs/ahg-2026/kit/step-cards/1-why-we-are-here.pptx
@@ -16,6 +16,7 @@
     <p:sldId id="264" r:id="rId15"/>
     <p:sldId id="265" r:id="rId16"/>
     <p:sldId id="266" r:id="rId17"/>
+    <p:sldId id="267" r:id="rId18"/>
   </p:sldIdLst>
   <p:sldSz cx="12191695" cy="6858000" type="screen4x3"/>
   <p:notesSz cx="6858000" cy="9144000"/>
@@ -3316,6 +3317,101 @@
                 <a:latin typeface="Arial"/>
               </a:rPr>
               <a:t>The two rules travel with you: nothing private goes into any AI, and a person reviews everything an agent writes.</a:t>
+            </a:r>
+          </a:p>
+        </p:txBody>
+      </p:sp>
+    </p:spTree>
+  </p:cSld>
+  <p:clrMapOvr>
+    <a:masterClrMapping/>
+  </p:clrMapOvr>
+</p:sld>
+</file>
+
+<file path=ppt/slides/slide12.xml><?xml version="1.0" encoding="utf-8"?>
+<p:sld xmlns:a="http://schemas.openxmlformats.org/drawingml/2006/main" xmlns:p="http://schemas.openxmlformats.org/presentationml/2006/main" xmlns:r="http://schemas.openxmlformats.org/officeDocument/2006/relationships">
+  <p:cSld>
+    <p:spTree>
+      <p:nvGrpSpPr>
+        <p:cNvPr id="1" name=""/>
+        <p:cNvGrpSpPr/>
+        <p:nvPr/>
+      </p:nvGrpSpPr>
+      <p:grpSpPr/>
+      <p:sp>
+        <p:nvSpPr>
+          <p:cNvPr id="2" name="Title 1"/>
+          <p:cNvSpPr>
+            <a:spLocks noGrp="1"/>
+          </p:cNvSpPr>
+          <p:nvPr>
+            <p:ph type="title"/>
+          </p:nvPr>
+        </p:nvSpPr>
+        <p:spPr>
+          <a:xfrm>
+            <a:off x="548640" y="365760"/>
+            <a:ext cx="11064240" cy="1097280"/>
+          </a:xfrm>
+        </p:spPr>
+        <p:txBody>
+          <a:bodyPr wrap="square"/>
+          <a:lstStyle/>
+          <a:p>
+            <a:r>
+              <a:rPr sz="3600" b="1" lang="en-US">
+                <a:latin typeface="Arial"/>
+              </a:rPr>
+              <a:t>Sources</a:t>
+            </a:r>
+          </a:p>
+        </p:txBody>
+      </p:sp>
+      <p:sp>
+        <p:nvSpPr>
+          <p:cNvPr id="3" name="Content Placeholder 2"/>
+          <p:cNvSpPr>
+            <a:spLocks noGrp="1"/>
+          </p:cNvSpPr>
+          <p:nvPr>
+            <p:ph idx="1"/>
+          </p:nvPr>
+        </p:nvSpPr>
+        <p:spPr>
+          <a:xfrm>
+            <a:off x="548640" y="1554480"/>
+            <a:ext cx="11064240" cy="4937760"/>
+          </a:xfrm>
+        </p:spPr>
+        <p:txBody>
+          <a:bodyPr wrap="square"/>
+          <a:lstStyle/>
+          <a:p>
+            <a:pPr marL="0" indent="0">
+              <a:spcAft>
+                <a:spcPts val="600"/>
+              </a:spcAft>
+              <a:buNone/>
+            </a:pPr>
+            <a:r>
+              <a:rPr sz="2000" b="0" lang="en-US">
+                <a:latin typeface="Arial"/>
+              </a:rPr>
+              <a:t>Checked on 29 October 2026: the keys on this card are in the kit's README, with their sources. The standard every agent cites is </a:t>
+            </a:r>
+            <a:r>
+              <a:rPr sz="2000" b="0" lang="en-US">
+                <a:latin typeface="Arial"/>
+                <a:hlinkClick r:id="rId2"/>
+              </a:rPr>
+              <a:t>WCAG 2.2</a:t>
+            </a:r>
+            <a:r>
+              <a:rPr sz="2000" b="0" lang="en-US">
+                <a:latin typeface="Arial"/>
+              </a:rPr>
+              <a:t>.</a:t>
             </a:r>
           </a:p>
         </p:txBody>
